--- a/Demand Analysis/demand_analysis.pptx
+++ b/Demand Analysis/demand_analysis.pptx
@@ -11504,7 +11504,7 @@
         <p:spPr>
           <a:xfrm>
             <a:off x="1402080" y="5259331"/>
-            <a:ext cx="6207760" cy="1035416"/>
+            <a:ext cx="8046720" cy="1035416"/>
           </a:xfrm>
           <a:prstGeom prst="rect">
             <a:avLst/>
@@ -11776,12 +11776,9 @@
           </a:p>
           <a:p>
             <a:r>
-              <a:rPr lang="tr-TR" sz="1200" dirty="0">
-                <a:hlinkClick r:id="rId2"/>
-              </a:rPr>
-              <a:t>https://github.com/ali-can-turan/case-studies-academic</a:t>
-            </a:r>
-            <a:endParaRPr lang="tr-TR" sz="1200" dirty="0"/>
+              <a:rPr lang="tr-TR" sz="1200" dirty="0"/>
+              <a:t>https://github.com/ali-can-turan/case-studies-academic/tree/main/Demand%20Analysis </a:t>
+            </a:r>
           </a:p>
           <a:p>
             <a:r>
